--- a/中越詩歌/憑你意行_Nguyện theo ý Cha.pptx
+++ b/中越詩歌/憑你意行_Nguyện theo ý Cha.pptx
@@ -309,7 +309,7 @@
           <a:p>
             <a:fld id="{69B985D6-369D-4BD6-BE84-0186947AB96A}" type="datetimeFigureOut">
               <a:rPr lang="vi-VN" smtClean="0"/>
-              <a:t>04/11/2023</a:t>
+              <a:t>13/02/2026</a:t>
             </a:fld>
             <a:endParaRPr lang="vi-VN"/>
           </a:p>
@@ -479,7 +479,7 @@
           <a:p>
             <a:fld id="{69B985D6-369D-4BD6-BE84-0186947AB96A}" type="datetimeFigureOut">
               <a:rPr lang="vi-VN" smtClean="0"/>
-              <a:t>04/11/2023</a:t>
+              <a:t>13/02/2026</a:t>
             </a:fld>
             <a:endParaRPr lang="vi-VN"/>
           </a:p>
@@ -659,7 +659,7 @@
           <a:p>
             <a:fld id="{69B985D6-369D-4BD6-BE84-0186947AB96A}" type="datetimeFigureOut">
               <a:rPr lang="vi-VN" smtClean="0"/>
-              <a:t>04/11/2023</a:t>
+              <a:t>13/02/2026</a:t>
             </a:fld>
             <a:endParaRPr lang="vi-VN"/>
           </a:p>
@@ -829,7 +829,7 @@
           <a:p>
             <a:fld id="{69B985D6-369D-4BD6-BE84-0186947AB96A}" type="datetimeFigureOut">
               <a:rPr lang="vi-VN" smtClean="0"/>
-              <a:t>04/11/2023</a:t>
+              <a:t>13/02/2026</a:t>
             </a:fld>
             <a:endParaRPr lang="vi-VN"/>
           </a:p>
@@ -1075,7 +1075,7 @@
           <a:p>
             <a:fld id="{69B985D6-369D-4BD6-BE84-0186947AB96A}" type="datetimeFigureOut">
               <a:rPr lang="vi-VN" smtClean="0"/>
-              <a:t>04/11/2023</a:t>
+              <a:t>13/02/2026</a:t>
             </a:fld>
             <a:endParaRPr lang="vi-VN"/>
           </a:p>
@@ -1363,7 +1363,7 @@
           <a:p>
             <a:fld id="{69B985D6-369D-4BD6-BE84-0186947AB96A}" type="datetimeFigureOut">
               <a:rPr lang="vi-VN" smtClean="0"/>
-              <a:t>04/11/2023</a:t>
+              <a:t>13/02/2026</a:t>
             </a:fld>
             <a:endParaRPr lang="vi-VN"/>
           </a:p>
@@ -1785,7 +1785,7 @@
           <a:p>
             <a:fld id="{69B985D6-369D-4BD6-BE84-0186947AB96A}" type="datetimeFigureOut">
               <a:rPr lang="vi-VN" smtClean="0"/>
-              <a:t>04/11/2023</a:t>
+              <a:t>13/02/2026</a:t>
             </a:fld>
             <a:endParaRPr lang="vi-VN"/>
           </a:p>
@@ -1903,7 +1903,7 @@
           <a:p>
             <a:fld id="{69B985D6-369D-4BD6-BE84-0186947AB96A}" type="datetimeFigureOut">
               <a:rPr lang="vi-VN" smtClean="0"/>
-              <a:t>04/11/2023</a:t>
+              <a:t>13/02/2026</a:t>
             </a:fld>
             <a:endParaRPr lang="vi-VN"/>
           </a:p>
@@ -1998,7 +1998,7 @@
           <a:p>
             <a:fld id="{69B985D6-369D-4BD6-BE84-0186947AB96A}" type="datetimeFigureOut">
               <a:rPr lang="vi-VN" smtClean="0"/>
-              <a:t>04/11/2023</a:t>
+              <a:t>13/02/2026</a:t>
             </a:fld>
             <a:endParaRPr lang="vi-VN"/>
           </a:p>
@@ -2275,7 +2275,7 @@
           <a:p>
             <a:fld id="{69B985D6-369D-4BD6-BE84-0186947AB96A}" type="datetimeFigureOut">
               <a:rPr lang="vi-VN" smtClean="0"/>
-              <a:t>04/11/2023</a:t>
+              <a:t>13/02/2026</a:t>
             </a:fld>
             <a:endParaRPr lang="vi-VN"/>
           </a:p>
@@ -2532,7 +2532,7 @@
           <a:p>
             <a:fld id="{69B985D6-369D-4BD6-BE84-0186947AB96A}" type="datetimeFigureOut">
               <a:rPr lang="vi-VN" smtClean="0"/>
-              <a:t>04/11/2023</a:t>
+              <a:t>13/02/2026</a:t>
             </a:fld>
             <a:endParaRPr lang="vi-VN"/>
           </a:p>
@@ -2750,7 +2750,7 @@
           <a:p>
             <a:fld id="{69B985D6-369D-4BD6-BE84-0186947AB96A}" type="datetimeFigureOut">
               <a:rPr lang="vi-VN" smtClean="0"/>
-              <a:t>04/11/2023</a:t>
+              <a:t>13/02/2026</a:t>
             </a:fld>
             <a:endParaRPr lang="vi-VN"/>
           </a:p>
@@ -3148,6 +3148,40 @@
           <a:lstStyle/>
           <a:p>
             <a:r>
+              <a:rPr lang="zh-CN" altLang="en-US" sz="7200" b="1" i="1" dirty="0" smtClean="0">
+                <a:solidFill>
+                  <a:srgbClr val="000066"/>
+                </a:solidFill>
+                <a:effectLst>
+                  <a:outerShdw blurRad="38100" dist="38100" dir="2700000" algn="tl">
+                    <a:srgbClr val="000000">
+                      <a:alpha val="43137"/>
+                    </a:srgbClr>
+                  </a:outerShdw>
+                </a:effectLst>
+                <a:latin typeface="微軟正黑體" pitchFamily="34" charset="-120"/>
+                <a:ea typeface="微軟正黑體" pitchFamily="34" charset="-120"/>
+              </a:rPr>
+              <a:t>宣 </a:t>
+            </a:r>
+            <a:r>
+              <a:rPr lang="en-US" altLang="zh-CN" sz="7200" b="1" i="1" dirty="0" smtClean="0">
+                <a:solidFill>
+                  <a:srgbClr val="000066"/>
+                </a:solidFill>
+                <a:effectLst>
+                  <a:outerShdw blurRad="38100" dist="38100" dir="2700000" algn="tl">
+                    <a:srgbClr val="000000">
+                      <a:alpha val="43137"/>
+                    </a:srgbClr>
+                  </a:outerShdw>
+                </a:effectLst>
+                <a:latin typeface="微軟正黑體" pitchFamily="34" charset="-120"/>
+                <a:ea typeface="微軟正黑體" pitchFamily="34" charset="-120"/>
+              </a:rPr>
+              <a:t>159 - </a:t>
+            </a:r>
+            <a:r>
               <a:rPr lang="zh-TW" altLang="en-US" sz="7200" b="1" i="1" dirty="0" smtClean="0">
                 <a:solidFill>
                   <a:srgbClr val="000066"/>
@@ -3272,7 +3306,61 @@
                 <a:ea typeface="微軟正黑體" pitchFamily="34" charset="-120"/>
                 <a:cs typeface="Calibri" panose="020F0502020204030204" pitchFamily="34" charset="0"/>
               </a:rPr>
-              <a:t>Nguyện theo ý Cha</a:t>
+              <a:t>Nguyện theo ý </a:t>
+            </a:r>
+            <a:r>
+              <a:rPr lang="vi-VN" sz="5400" b="1" i="1" dirty="0" smtClean="0">
+                <a:solidFill>
+                  <a:srgbClr val="660033"/>
+                </a:solidFill>
+                <a:effectLst>
+                  <a:outerShdw blurRad="38100" dist="38100" dir="2700000" algn="tl">
+                    <a:srgbClr val="000000">
+                      <a:alpha val="43137"/>
+                    </a:srgbClr>
+                  </a:outerShdw>
+                </a:effectLst>
+                <a:latin typeface="Calibri" panose="020F0502020204030204" pitchFamily="34" charset="0"/>
+                <a:ea typeface="微軟正黑體" pitchFamily="34" charset="-120"/>
+                <a:cs typeface="Calibri" panose="020F0502020204030204" pitchFamily="34" charset="0"/>
+              </a:rPr>
+              <a:t>Cha</a:t>
+            </a:r>
+            <a:r>
+              <a:rPr lang="en-US" sz="5400" b="1" i="1" smtClean="0">
+                <a:solidFill>
+                  <a:srgbClr val="660033"/>
+                </a:solidFill>
+                <a:effectLst>
+                  <a:outerShdw blurRad="38100" dist="38100" dir="2700000" algn="tl">
+                    <a:srgbClr val="000000">
+                      <a:alpha val="43137"/>
+                    </a:srgbClr>
+                  </a:outerShdw>
+                </a:effectLst>
+                <a:latin typeface="Calibri" panose="020F0502020204030204" pitchFamily="34" charset="0"/>
+                <a:ea typeface="微軟正黑體" pitchFamily="34" charset="-120"/>
+                <a:cs typeface="Calibri" panose="020F0502020204030204" pitchFamily="34" charset="0"/>
+              </a:rPr>
+              <a:t> </a:t>
+            </a:r>
+            <a:r>
+              <a:rPr lang="en-US" sz="5400" b="1" i="1" smtClean="0">
+                <a:solidFill>
+                  <a:srgbClr val="660033"/>
+                </a:solidFill>
+                <a:effectLst>
+                  <a:outerShdw blurRad="38100" dist="38100" dir="2700000" algn="tl">
+                    <a:srgbClr val="000000">
+                      <a:alpha val="43137"/>
+                    </a:srgbClr>
+                  </a:outerShdw>
+                </a:effectLst>
+                <a:latin typeface="Calibri" panose="020F0502020204030204" pitchFamily="34" charset="0"/>
+                <a:ea typeface="微軟正黑體" pitchFamily="34" charset="-120"/>
+                <a:cs typeface="Calibri" panose="020F0502020204030204" pitchFamily="34" charset="0"/>
+              </a:rPr>
+              <a:t>(TC 237)</a:t>
             </a:r>
             <a:endParaRPr lang="zh-TW" altLang="en-US" sz="5400" b="1" i="1" dirty="0">
               <a:solidFill>
@@ -3652,23 +3740,7 @@
                   <a:srgbClr val="000066"/>
                 </a:solidFill>
               </a:rPr>
-              <a:t>( </a:t>
-            </a:r>
-            <a:r>
-              <a:rPr lang="en-US" sz="3600" b="1" dirty="0">
-                <a:solidFill>
-                  <a:srgbClr val="000066"/>
-                </a:solidFill>
-              </a:rPr>
-              <a:t>3 </a:t>
-            </a:r>
-            <a:r>
-              <a:rPr lang="en-US" sz="3600" b="1" dirty="0">
-                <a:solidFill>
-                  <a:srgbClr val="000066"/>
-                </a:solidFill>
-              </a:rPr>
-              <a:t>/ 4 )</a:t>
+              <a:t>( 3 / 4 )</a:t>
             </a:r>
             <a:endParaRPr lang="vi-VN" sz="3600" b="1" dirty="0">
               <a:solidFill>
@@ -4951,23 +5023,7 @@
                   <a:srgbClr val="000066"/>
                 </a:solidFill>
               </a:rPr>
-              <a:t>( </a:t>
-            </a:r>
-            <a:r>
-              <a:rPr lang="en-US" sz="3600" b="1" dirty="0">
-                <a:solidFill>
-                  <a:srgbClr val="000066"/>
-                </a:solidFill>
-              </a:rPr>
-              <a:t>4 </a:t>
-            </a:r>
-            <a:r>
-              <a:rPr lang="en-US" sz="3600" b="1" dirty="0">
-                <a:solidFill>
-                  <a:srgbClr val="000066"/>
-                </a:solidFill>
-              </a:rPr>
-              <a:t>/ 4 )</a:t>
+              <a:t>( 4 / 4 )</a:t>
             </a:r>
             <a:endParaRPr lang="vi-VN" sz="3600" b="1" dirty="0">
               <a:solidFill>
@@ -7583,23 +7639,7 @@
                   <a:srgbClr val="000066"/>
                 </a:solidFill>
               </a:rPr>
-              <a:t>( </a:t>
-            </a:r>
-            <a:r>
-              <a:rPr lang="en-US" sz="3600" b="1" dirty="0">
-                <a:solidFill>
-                  <a:srgbClr val="000066"/>
-                </a:solidFill>
-              </a:rPr>
-              <a:t>2 </a:t>
-            </a:r>
-            <a:r>
-              <a:rPr lang="en-US" sz="3600" b="1" dirty="0">
-                <a:solidFill>
-                  <a:srgbClr val="000066"/>
-                </a:solidFill>
-              </a:rPr>
-              <a:t>/ 4 )</a:t>
+              <a:t>( 2 / 4 )</a:t>
             </a:r>
             <a:endParaRPr lang="vi-VN" sz="3600" b="1" dirty="0">
               <a:solidFill>
